--- a/dist/초1/국어/한글/초1_국어_한글_05_쌍자음과여러가지모음_학생용.pptx
+++ b/dist/초1/국어/한글/초1_국어_한글_05_쌍자음과여러가지모음_학생용.pptx
@@ -119,13 +119,13 @@
   <p:extLst>
     <p:ext uri="{521415D9-36F7-43E2-AB2F-B90AF26B5E84}">
       <p14:sectionLst xmlns:p14="http://schemas.microsoft.com/office/powerpoint/2010/main">
-        <p14:section name="도입" id="{4586e967-ea45-18a7-195e-ee4d6247bf6e}">
+        <p14:section name="도입" id="{d665b598-be2d-9e71-d0d5-e08b4dab780b}">
           <p14:sldIdLst>
             <p14:sldId id="256"/>
             <p14:sldId id="257"/>
           </p14:sldIdLst>
         </p14:section>
-        <p14:section name="개념" id="{f3a2b396-3d72-f17b-1156-bf13e2ccb09d}">
+        <p14:section name="개념" id="{ff2cff49-a9bb-e9c4-6f28-653f5adb6805}">
           <p14:sldIdLst>
             <p14:sldId id="258"/>
             <p14:sldId id="259"/>
@@ -133,31 +133,31 @@
             <p14:sldId id="263"/>
           </p14:sldIdLst>
         </p14:section>
-        <p14:section name="연습" id="{8c537651-174f-5e9d-fce8-034fe764fd4b}">
+        <p14:section name="연습" id="{994b3d64-cf24-90f1-c479-537932018e9f}">
           <p14:sldIdLst>
             <p14:sldId id="260"/>
             <p14:sldId id="261"/>
             <p14:sldId id="264"/>
           </p14:sldIdLst>
         </p14:section>
-        <p14:section name="개념" id="{6077259d-7516-cdb3-e4c4-71673a40540d}">
+        <p14:section name="개념" id="{7e75459f-5039-de8a-6293-d41650bdb74f}">
           <p14:sldIdLst/>
         </p14:section>
-        <p14:section name="연습" id="{423fcbc6-533c-b359-f887-f3776f049f32}">
+        <p14:section name="연습" id="{83972238-2cbc-a19f-a4f5-f7c5a5fc1480}">
           <p14:sldIdLst/>
         </p14:section>
-        <p14:section name="확인" id="{8b097291-a691-d81f-8885-d388779fcaa3}">
+        <p14:section name="확인" id="{90321737-c2d9-ca72-17da-4b3ecd111db6}">
           <p14:sldIdLst>
             <p14:sldId id="265"/>
             <p14:sldId id="266"/>
           </p14:sldIdLst>
         </p14:section>
-        <p14:section name="정리" id="{f1b47f7f-36c1-3b2e-d87d-35a4f0344726}">
+        <p14:section name="정리" id="{c39b78bd-0b2a-bdf4-ee82-46d781f98768}">
           <p14:sldIdLst>
             <p14:sldId id="267"/>
           </p14:sldIdLst>
         </p14:section>
-        <p14:section name="보충" id="{efc37cc1-3b3a-9aeb-2950-fbac28395f54}">
+        <p14:section name="보충" id="{41b5e8ba-c3cf-b14a-4639-2e04d33982f3}">
           <p14:sldIdLst>
             <p14:sldId id="268"/>
           </p14:sldIdLst>

--- a/dist/초1/국어/한글/초1_국어_한글_05_쌍자음과여러가지모음_학생용.pptx
+++ b/dist/초1/국어/한글/초1_국어_한글_05_쌍자음과여러가지모음_학생용.pptx
@@ -119,13 +119,13 @@
   <p:extLst>
     <p:ext uri="{521415D9-36F7-43E2-AB2F-B90AF26B5E84}">
       <p14:sectionLst xmlns:p14="http://schemas.microsoft.com/office/powerpoint/2010/main">
-        <p14:section name="도입" id="{d665b598-be2d-9e71-d0d5-e08b4dab780b}">
+        <p14:section name="도입" id="{8e9dbb0d-490c-7d5b-b0ae-b6cbb9932d68}">
           <p14:sldIdLst>
             <p14:sldId id="256"/>
             <p14:sldId id="257"/>
           </p14:sldIdLst>
         </p14:section>
-        <p14:section name="개념" id="{ff2cff49-a9bb-e9c4-6f28-653f5adb6805}">
+        <p14:section name="개념" id="{d1cd2525-b715-fb59-bd2e-41cdbef2cb5d}">
           <p14:sldIdLst>
             <p14:sldId id="258"/>
             <p14:sldId id="259"/>
@@ -133,31 +133,31 @@
             <p14:sldId id="263"/>
           </p14:sldIdLst>
         </p14:section>
-        <p14:section name="연습" id="{994b3d64-cf24-90f1-c479-537932018e9f}">
+        <p14:section name="연습" id="{dd3d7802-100c-3788-ccd5-8e7729c0af06}">
           <p14:sldIdLst>
             <p14:sldId id="260"/>
             <p14:sldId id="261"/>
             <p14:sldId id="264"/>
           </p14:sldIdLst>
         </p14:section>
-        <p14:section name="개념" id="{7e75459f-5039-de8a-6293-d41650bdb74f}">
+        <p14:section name="개념" id="{163f8d2d-1c42-035f-9159-43a1dade8440}">
           <p14:sldIdLst/>
         </p14:section>
-        <p14:section name="연습" id="{83972238-2cbc-a19f-a4f5-f7c5a5fc1480}">
+        <p14:section name="연습" id="{69ae9e98-7278-feec-a2c0-f4d26a440771}">
           <p14:sldIdLst/>
         </p14:section>
-        <p14:section name="확인" id="{90321737-c2d9-ca72-17da-4b3ecd111db6}">
+        <p14:section name="확인" id="{6cc98954-bf2a-f3e4-7f03-42a9d66b373d}">
           <p14:sldIdLst>
             <p14:sldId id="265"/>
             <p14:sldId id="266"/>
           </p14:sldIdLst>
         </p14:section>
-        <p14:section name="정리" id="{c39b78bd-0b2a-bdf4-ee82-46d781f98768}">
+        <p14:section name="정리" id="{2374f616-d561-3283-82ef-177d738a1526}">
           <p14:sldIdLst>
             <p14:sldId id="267"/>
           </p14:sldIdLst>
         </p14:section>
-        <p14:section name="보충" id="{41b5e8ba-c3cf-b14a-4639-2e04d33982f3}">
+        <p14:section name="보충" id="{e57daec7-13f5-f46b-0402-9eded84a2b61}">
           <p14:sldIdLst>
             <p14:sldId id="268"/>
           </p14:sldIdLst>
@@ -3218,7 +3218,7 @@
         <p:spPr>
           <a:xfrm>
             <a:off x="1344168" y="2011680"/>
-            <a:ext cx="1965960" cy="1280160"/>
+            <a:ext cx="2606040" cy="1280160"/>
           </a:xfrm>
           <a:prstGeom prst="roundRect">
             <a:avLst>
@@ -3264,8 +3264,8 @@
         </p:nvSpPr>
         <p:spPr>
           <a:xfrm>
-            <a:off x="3584448" y="2011680"/>
-            <a:ext cx="1965960" cy="1280160"/>
+            <a:off x="4224528" y="2011680"/>
+            <a:ext cx="2606040" cy="1280160"/>
           </a:xfrm>
           <a:prstGeom prst="roundRect">
             <a:avLst>
@@ -3359,7 +3359,7 @@
         <p:spPr>
           <a:xfrm>
             <a:off x="1344168" y="3474720"/>
-            <a:ext cx="1965960" cy="1280160"/>
+            <a:ext cx="2606040" cy="1280160"/>
           </a:xfrm>
           <a:prstGeom prst="roundRect">
             <a:avLst>
@@ -3405,8 +3405,8 @@
         </p:nvSpPr>
         <p:spPr>
           <a:xfrm>
-            <a:off x="3584448" y="3474720"/>
-            <a:ext cx="1965960" cy="1280160"/>
+            <a:off x="4224528" y="3474720"/>
+            <a:ext cx="2606040" cy="1280160"/>
           </a:xfrm>
           <a:prstGeom prst="roundRect">
             <a:avLst>
@@ -3500,7 +3500,7 @@
         <p:spPr>
           <a:xfrm>
             <a:off x="1344168" y="4937760"/>
-            <a:ext cx="1965960" cy="1280160"/>
+            <a:ext cx="2606040" cy="1280160"/>
           </a:xfrm>
           <a:prstGeom prst="roundRect">
             <a:avLst>
@@ -3546,8 +3546,8 @@
         </p:nvSpPr>
         <p:spPr>
           <a:xfrm>
-            <a:off x="3584448" y="4937760"/>
-            <a:ext cx="1965960" cy="1280160"/>
+            <a:off x="4224528" y="4937760"/>
+            <a:ext cx="2606040" cy="1280160"/>
           </a:xfrm>
           <a:prstGeom prst="roundRect">
             <a:avLst>
@@ -5279,7 +5279,7 @@
         </p:nvSpPr>
         <p:spPr>
           <a:xfrm>
-            <a:off x="548640" y="2459736"/>
+            <a:off x="548640" y="2734056"/>
             <a:ext cx="566928" cy="566928"/>
           </a:xfrm>
           <a:prstGeom prst="roundRect">
@@ -5326,12 +5326,12 @@
         </p:nvSpPr>
         <p:spPr>
           <a:xfrm>
-            <a:off x="1344168" y="2109216"/>
-            <a:ext cx="1267968" cy="1267968"/>
+            <a:off x="1828800" y="2331720"/>
+            <a:ext cx="1371600" cy="1371600"/>
           </a:xfrm>
           <a:prstGeom prst="roundRect">
             <a:avLst>
-              <a:gd name="adj" fmla="val 10096"/>
+              <a:gd name="adj" fmla="val 9333"/>
             </a:avLst>
           </a:prstGeom>
           <a:solidFill>
@@ -5351,7 +5351,7 @@
               <a:buNone/>
             </a:pPr>
             <a:r>
-              <a:rPr lang="ko-KR" altLang="en-US" sz="5500" b="1" dirty="0">
+              <a:rPr lang="ko-KR" altLang="en-US" sz="5900" b="1" dirty="0">
                 <a:solidFill>
                   <a:srgbClr val="1F2937"/>
                 </a:solidFill>
@@ -5361,7 +5361,7 @@
               </a:rPr>
               <a:t>곰</a:t>
             </a:r>
-            <a:endParaRPr lang="ko-KR" sz="5500" dirty="0"/>
+            <a:endParaRPr lang="ko-KR" sz="5900" dirty="0"/>
           </a:p>
         </p:txBody>
       </p:sp>
@@ -5373,12 +5373,12 @@
         </p:nvSpPr>
         <p:spPr>
           <a:xfrm>
-            <a:off x="2813304" y="2109216"/>
-            <a:ext cx="1267968" cy="1267968"/>
+            <a:off x="3401568" y="2331720"/>
+            <a:ext cx="1371600" cy="1371600"/>
           </a:xfrm>
           <a:prstGeom prst="roundRect">
             <a:avLst>
-              <a:gd name="adj" fmla="val 10096"/>
+              <a:gd name="adj" fmla="val 9333"/>
             </a:avLst>
           </a:prstGeom>
           <a:solidFill>
@@ -5398,7 +5398,7 @@
               <a:buNone/>
             </a:pPr>
             <a:r>
-              <a:rPr lang="ko-KR" altLang="en-US" sz="5500" b="1" dirty="0">
+              <a:rPr lang="ko-KR" altLang="en-US" sz="5900" b="1" dirty="0">
                 <a:solidFill>
                   <a:srgbClr val="1F2937"/>
                 </a:solidFill>
@@ -5408,7 +5408,7 @@
               </a:rPr>
               <a:t>산</a:t>
             </a:r>
-            <a:endParaRPr lang="ko-KR" sz="5500" dirty="0"/>
+            <a:endParaRPr lang="ko-KR" sz="5900" dirty="0"/>
           </a:p>
         </p:txBody>
       </p:sp>
@@ -5420,12 +5420,12 @@
         </p:nvSpPr>
         <p:spPr>
           <a:xfrm>
-            <a:off x="4282440" y="2109216"/>
-            <a:ext cx="1267968" cy="1267968"/>
+            <a:off x="4974336" y="2331720"/>
+            <a:ext cx="1371600" cy="1371600"/>
           </a:xfrm>
           <a:prstGeom prst="roundRect">
             <a:avLst>
-              <a:gd name="adj" fmla="val 10096"/>
+              <a:gd name="adj" fmla="val 9333"/>
             </a:avLst>
           </a:prstGeom>
           <a:solidFill>
@@ -5445,7 +5445,7 @@
               <a:buNone/>
             </a:pPr>
             <a:r>
-              <a:rPr lang="ko-KR" altLang="en-US" sz="5500" b="1" dirty="0">
+              <a:rPr lang="ko-KR" altLang="en-US" sz="5900" b="1" dirty="0">
                 <a:solidFill>
                   <a:srgbClr val="1F2937"/>
                 </a:solidFill>
@@ -5455,7 +5455,7 @@
               </a:rPr>
               <a:t>밥</a:t>
             </a:r>
-            <a:endParaRPr lang="ko-KR" sz="5500" dirty="0"/>
+            <a:endParaRPr lang="ko-KR" sz="5900" dirty="0"/>
           </a:p>
         </p:txBody>
       </p:sp>
@@ -5467,7 +5467,7 @@
         </p:nvSpPr>
         <p:spPr>
           <a:xfrm>
-            <a:off x="548640" y="4654296"/>
+            <a:off x="548640" y="4928616"/>
             <a:ext cx="566928" cy="566928"/>
           </a:xfrm>
           <a:prstGeom prst="roundRect">
@@ -5514,12 +5514,12 @@
         </p:nvSpPr>
         <p:spPr>
           <a:xfrm>
-            <a:off x="1344168" y="4206240"/>
-            <a:ext cx="1965960" cy="1463040"/>
+            <a:off x="1344168" y="4343400"/>
+            <a:ext cx="2606040" cy="1737360"/>
           </a:xfrm>
           <a:prstGeom prst="roundRect">
             <a:avLst>
-              <a:gd name="adj" fmla="val 8750"/>
+              <a:gd name="adj" fmla="val 7368"/>
             </a:avLst>
           </a:prstGeom>
           <a:solidFill>
@@ -5561,12 +5561,12 @@
         </p:nvSpPr>
         <p:spPr>
           <a:xfrm>
-            <a:off x="3584448" y="4206240"/>
-            <a:ext cx="1965960" cy="1463040"/>
+            <a:off x="4224528" y="4343400"/>
+            <a:ext cx="2606040" cy="1737360"/>
           </a:xfrm>
           <a:prstGeom prst="roundRect">
             <a:avLst>
-              <a:gd name="adj" fmla="val 8750"/>
+              <a:gd name="adj" fmla="val 7368"/>
             </a:avLst>
           </a:prstGeom>
           <a:solidFill>
@@ -6972,7 +6972,7 @@
                         <a:buNone/>
                       </a:pPr>
                       <a:r>
-                        <a:rPr lang="en-US" sz="3200" b="1" dirty="0">
+                        <a:rPr lang="en-US" sz="4500" b="1" dirty="0">
                           <a:solidFill>
                             <a:srgbClr val="1F2937"/>
                           </a:solidFill>
@@ -6982,7 +6982,7 @@
                         </a:rPr>
                         <a:t>ㅏ</a:t>
                       </a:r>
-                      <a:endParaRPr lang="en-US" sz="3200" dirty="0">
+                      <a:endParaRPr lang="en-US" sz="4500" dirty="0">
                         <a:latin typeface="맑은 고딕" charset="0"/>
                         <a:ea typeface="맑은 고딕" charset="0"/>
                         <a:cs typeface="맑은 고딕" charset="0"/>
@@ -7040,7 +7040,7 @@
                         <a:buNone/>
                       </a:pPr>
                       <a:r>
-                        <a:rPr lang="en-US" sz="3200" b="1" dirty="0">
+                        <a:rPr lang="en-US" sz="4500" b="1" dirty="0">
                           <a:solidFill>
                             <a:srgbClr val="1F2937"/>
                           </a:solidFill>
@@ -7050,7 +7050,7 @@
                         </a:rPr>
                         <a:t>ㅗ</a:t>
                       </a:r>
-                      <a:endParaRPr lang="en-US" sz="3200" dirty="0">
+                      <a:endParaRPr lang="en-US" sz="4500" dirty="0">
                         <a:latin typeface="맑은 고딕" charset="0"/>
                         <a:ea typeface="맑은 고딕" charset="0"/>
                         <a:cs typeface="맑은 고딕" charset="0"/>
@@ -7108,7 +7108,7 @@
                         <a:buNone/>
                       </a:pPr>
                       <a:r>
-                        <a:rPr lang="en-US" sz="3200" b="1" dirty="0">
+                        <a:rPr lang="en-US" sz="4500" b="1" dirty="0">
                           <a:solidFill>
                             <a:srgbClr val="1F2937"/>
                           </a:solidFill>
@@ -7118,7 +7118,7 @@
                         </a:rPr>
                         <a:t>ㅜ</a:t>
                       </a:r>
-                      <a:endParaRPr lang="en-US" sz="3200" dirty="0">
+                      <a:endParaRPr lang="en-US" sz="4500" dirty="0">
                         <a:latin typeface="맑은 고딕" charset="0"/>
                         <a:ea typeface="맑은 고딕" charset="0"/>
                         <a:cs typeface="맑은 고딕" charset="0"/>
@@ -7176,7 +7176,7 @@
                         <a:buNone/>
                       </a:pPr>
                       <a:r>
-                        <a:rPr lang="en-US" sz="3200" b="1" dirty="0">
+                        <a:rPr lang="en-US" sz="4500" b="1" dirty="0">
                           <a:solidFill>
                             <a:srgbClr val="1F2937"/>
                           </a:solidFill>
@@ -7186,7 +7186,7 @@
                         </a:rPr>
                         <a:t>ㅣ</a:t>
                       </a:r>
-                      <a:endParaRPr lang="en-US" sz="3200" dirty="0">
+                      <a:endParaRPr lang="en-US" sz="4500" dirty="0">
                         <a:latin typeface="맑은 고딕" charset="0"/>
                         <a:ea typeface="맑은 고딕" charset="0"/>
                         <a:cs typeface="맑은 고딕" charset="0"/>
@@ -7246,7 +7246,7 @@
                         <a:buNone/>
                       </a:pPr>
                       <a:r>
-                        <a:rPr lang="en-US" sz="3200" b="1" dirty="0">
+                        <a:rPr lang="en-US" sz="4500" b="1" dirty="0">
                           <a:solidFill>
                             <a:srgbClr val="1F2937"/>
                           </a:solidFill>
@@ -7256,7 +7256,7 @@
                         </a:rPr>
                         <a:t>ㄲ</a:t>
                       </a:r>
-                      <a:endParaRPr lang="en-US" sz="3200" dirty="0">
+                      <a:endParaRPr lang="en-US" sz="4500" dirty="0">
                         <a:latin typeface="맑은 고딕" charset="0"/>
                         <a:ea typeface="맑은 고딕" charset="0"/>
                         <a:cs typeface="맑은 고딕" charset="0"/>
@@ -7588,7 +7588,7 @@
                         <a:buNone/>
                       </a:pPr>
                       <a:r>
-                        <a:rPr lang="en-US" sz="3200" b="1" dirty="0">
+                        <a:rPr lang="en-US" sz="4500" b="1" dirty="0">
                           <a:solidFill>
                             <a:srgbClr val="1F2937"/>
                           </a:solidFill>
@@ -7598,7 +7598,7 @@
                         </a:rPr>
                         <a:t>ㄸ</a:t>
                       </a:r>
-                      <a:endParaRPr lang="en-US" sz="3200" dirty="0">
+                      <a:endParaRPr lang="en-US" sz="4500" dirty="0">
                         <a:latin typeface="맑은 고딕" charset="0"/>
                         <a:ea typeface="맑은 고딕" charset="0"/>
                         <a:cs typeface="맑은 고딕" charset="0"/>
@@ -7930,7 +7930,7 @@
                         <a:buNone/>
                       </a:pPr>
                       <a:r>
-                        <a:rPr lang="en-US" sz="3200" b="1" dirty="0">
+                        <a:rPr lang="en-US" sz="4500" b="1" dirty="0">
                           <a:solidFill>
                             <a:srgbClr val="1F2937"/>
                           </a:solidFill>
@@ -7940,7 +7940,7 @@
                         </a:rPr>
                         <a:t>ㅃ</a:t>
                       </a:r>
-                      <a:endParaRPr lang="en-US" sz="3200" dirty="0">
+                      <a:endParaRPr lang="en-US" sz="4500" dirty="0">
                         <a:latin typeface="맑은 고딕" charset="0"/>
                         <a:ea typeface="맑은 고딕" charset="0"/>
                         <a:cs typeface="맑은 고딕" charset="0"/>
@@ -8272,7 +8272,7 @@
                         <a:buNone/>
                       </a:pPr>
                       <a:r>
-                        <a:rPr lang="en-US" sz="3200" b="1" dirty="0">
+                        <a:rPr lang="en-US" sz="4500" b="1" dirty="0">
                           <a:solidFill>
                             <a:srgbClr val="1F2937"/>
                           </a:solidFill>
@@ -8282,7 +8282,7 @@
                         </a:rPr>
                         <a:t>ㅆ</a:t>
                       </a:r>
-                      <a:endParaRPr lang="en-US" sz="3200" dirty="0">
+                      <a:endParaRPr lang="en-US" sz="4500" dirty="0">
                         <a:latin typeface="맑은 고딕" charset="0"/>
                         <a:ea typeface="맑은 고딕" charset="0"/>
                         <a:cs typeface="맑은 고딕" charset="0"/>
@@ -8614,7 +8614,7 @@
                         <a:buNone/>
                       </a:pPr>
                       <a:r>
-                        <a:rPr lang="en-US" sz="3200" b="1" dirty="0">
+                        <a:rPr lang="en-US" sz="4500" b="1" dirty="0">
                           <a:solidFill>
                             <a:srgbClr val="1F2937"/>
                           </a:solidFill>
@@ -8624,7 +8624,7 @@
                         </a:rPr>
                         <a:t>ㅉ</a:t>
                       </a:r>
-                      <a:endParaRPr lang="en-US" sz="3200" dirty="0">
+                      <a:endParaRPr lang="en-US" sz="4500" dirty="0">
                         <a:latin typeface="맑은 고딕" charset="0"/>
                         <a:ea typeface="맑은 고딕" charset="0"/>
                         <a:cs typeface="맑은 고딕" charset="0"/>

--- a/dist/초1/국어/한글/초1_국어_한글_05_쌍자음과여러가지모음_학생용.pptx
+++ b/dist/초1/국어/한글/초1_국어_한글_05_쌍자음과여러가지모음_학생용.pptx
@@ -119,13 +119,13 @@
   <p:extLst>
     <p:ext uri="{521415D9-36F7-43E2-AB2F-B90AF26B5E84}">
       <p14:sectionLst xmlns:p14="http://schemas.microsoft.com/office/powerpoint/2010/main">
-        <p14:section name="도입" id="{8e9dbb0d-490c-7d5b-b0ae-b6cbb9932d68}">
+        <p14:section name="도입" id="{0f85ceb4-bf0d-0802-edb4-047a8fb0d66b}">
           <p14:sldIdLst>
             <p14:sldId id="256"/>
             <p14:sldId id="257"/>
           </p14:sldIdLst>
         </p14:section>
-        <p14:section name="개념" id="{d1cd2525-b715-fb59-bd2e-41cdbef2cb5d}">
+        <p14:section name="개념" id="{5d978e91-dc51-d2d9-f86e-fa00213cc5a8}">
           <p14:sldIdLst>
             <p14:sldId id="258"/>
             <p14:sldId id="259"/>
@@ -133,31 +133,31 @@
             <p14:sldId id="263"/>
           </p14:sldIdLst>
         </p14:section>
-        <p14:section name="연습" id="{dd3d7802-100c-3788-ccd5-8e7729c0af06}">
+        <p14:section name="연습" id="{92f6379a-a257-3e35-4b5b-31d93bdc1b4b}">
           <p14:sldIdLst>
             <p14:sldId id="260"/>
             <p14:sldId id="261"/>
             <p14:sldId id="264"/>
           </p14:sldIdLst>
         </p14:section>
-        <p14:section name="개념" id="{163f8d2d-1c42-035f-9159-43a1dade8440}">
+        <p14:section name="개념" id="{aa3c795e-bdc7-f446-a012-177d01858d62}">
           <p14:sldIdLst/>
         </p14:section>
-        <p14:section name="연습" id="{69ae9e98-7278-feec-a2c0-f4d26a440771}">
+        <p14:section name="연습" id="{0f5dfb31-058e-fc72-56d1-bc3dac1b200d}">
           <p14:sldIdLst/>
         </p14:section>
-        <p14:section name="확인" id="{6cc98954-bf2a-f3e4-7f03-42a9d66b373d}">
+        <p14:section name="확인" id="{1aee2730-0a1c-b823-65d7-dff74f33412a}">
           <p14:sldIdLst>
             <p14:sldId id="265"/>
             <p14:sldId id="266"/>
           </p14:sldIdLst>
         </p14:section>
-        <p14:section name="정리" id="{2374f616-d561-3283-82ef-177d738a1526}">
+        <p14:section name="정리" id="{2e40ab5e-5a02-1b03-1633-a3cec5a2f1a1}">
           <p14:sldIdLst>
             <p14:sldId id="267"/>
           </p14:sldIdLst>
         </p14:section>
-        <p14:section name="보충" id="{e57daec7-13f5-f46b-0402-9eded84a2b61}">
+        <p14:section name="보충" id="{2bb3d4dd-8f27-42cb-71a9-56fde72cb47c}">
           <p14:sldIdLst>
             <p14:sldId id="268"/>
           </p14:sldIdLst>
@@ -2705,7 +2705,7 @@
               <a:buNone/>
             </a:pPr>
             <a:r>
-              <a:rPr lang="ko-KR" altLang="en-US" sz="5000" b="1" dirty="0">
+              <a:rPr lang="ko-KR" altLang="en-US" sz="4400" b="1" dirty="0">
                 <a:solidFill>
                   <a:srgbClr val="FFFFFF"/>
                 </a:solidFill>
@@ -6891,7 +6891,7 @@
           </p:nvPr>
         </p:nvGraphicFramePr>
         <p:xfrm>
-          <a:off x="1979676" y="2164080"/>
+          <a:off x="1979676" y="2225040"/>
           <a:ext cx="8229600" cy="914400"/>
         </p:xfrm>
         <a:graphic>
@@ -6905,7 +6905,7 @@
                 <a:gridCol w="1645920"/>
                 <a:gridCol w="1645920"/>
               </a:tblGrid>
-              <a:tr h="650240">
+              <a:tr h="629920">
                 <a:tc>
                   <a:txBody>
                     <a:bodyPr/>
@@ -7236,7 +7236,7 @@
                   </a:tcPr>
                 </a:tc>
               </a:tr>
-              <a:tr h="650240">
+              <a:tr h="629920">
                 <a:tc>
                   <a:txBody>
                     <a:bodyPr/>
@@ -7578,7 +7578,7 @@
                   </a:tcPr>
                 </a:tc>
               </a:tr>
-              <a:tr h="650240">
+              <a:tr h="629920">
                 <a:tc>
                   <a:txBody>
                     <a:bodyPr/>
@@ -7920,7 +7920,7 @@
                   </a:tcPr>
                 </a:tc>
               </a:tr>
-              <a:tr h="650240">
+              <a:tr h="629920">
                 <a:tc>
                   <a:txBody>
                     <a:bodyPr/>
@@ -8262,7 +8262,7 @@
                   </a:tcPr>
                 </a:tc>
               </a:tr>
-              <a:tr h="650240">
+              <a:tr h="629920">
                 <a:tc>
                   <a:txBody>
                     <a:bodyPr/>
@@ -8604,7 +8604,7 @@
                   </a:tcPr>
                 </a:tc>
               </a:tr>
-              <a:tr h="650240">
+              <a:tr h="629920">
                 <a:tc>
                   <a:txBody>
                     <a:bodyPr/>
